--- a/output_pptx/Give_Thanks.pptx
+++ b/output_pptx/Give_Thanks.pptx
@@ -3107,8 +3107,8 @@
         </p:nvSpPr>
         <p:spPr>
           <a:xfrm>
-            <a:off x="594360" y="2258568"/>
-            <a:ext cx="11002975" cy="685800"/>
+            <a:off x="640080" y="2052828"/>
+            <a:ext cx="10911535" cy="731520"/>
           </a:xfrm>
           <a:prstGeom prst="rect">
             <a:avLst/>
@@ -3123,7 +3123,7 @@
           <a:p>
             <a:pPr algn="ctr"/>
             <a:r>
-              <a:rPr sz="4400" b="1" i="0">
+              <a:rPr sz="4800" b="1" i="0">
                 <a:solidFill>
                   <a:srgbClr val="FFFFFF"/>
                 </a:solidFill>
@@ -3142,8 +3142,8 @@
         </p:nvSpPr>
         <p:spPr>
           <a:xfrm>
-            <a:off x="594360" y="2980944"/>
-            <a:ext cx="11002975" cy="347472"/>
+            <a:off x="640080" y="2985516"/>
+            <a:ext cx="10911535" cy="731520"/>
           </a:xfrm>
           <a:prstGeom prst="rect">
             <a:avLst/>
@@ -3158,83 +3158,13 @@
           <a:p>
             <a:pPr algn="ctr"/>
             <a:r>
-              <a:rPr sz="2200" b="0" i="1">
-                <a:solidFill>
-                  <a:srgbClr val="8C8C8C"/>
-                </a:solidFill>
-                <a:latin typeface="Arial"/>
-              </a:rPr>
-              <a:t/>
-            </a:r>
-          </a:p>
-        </p:txBody>
-      </p:sp>
-      <p:sp>
-        <p:nvSpPr>
-          <p:cNvPr id="4" name="TextBox 3"/>
-          <p:cNvSpPr txBox="1"/>
-          <p:nvPr/>
-        </p:nvSpPr>
-        <p:spPr>
-          <a:xfrm>
-            <a:off x="594360" y="3529584"/>
-            <a:ext cx="11002975" cy="685800"/>
-          </a:xfrm>
-          <a:prstGeom prst="rect">
-            <a:avLst/>
-          </a:prstGeom>
-          <a:noFill/>
-        </p:spPr>
-        <p:txBody>
-          <a:bodyPr wrap="square">
-            <a:spAutoFit/>
-          </a:bodyPr>
-          <a:lstStyle/>
-          <a:p>
-            <a:pPr algn="ctr"/>
-            <a:r>
-              <a:rPr sz="4400" b="1" i="0">
+              <a:rPr sz="4800" b="1" i="0">
                 <a:solidFill>
                   <a:srgbClr val="FFFFFF"/>
                 </a:solidFill>
                 <a:latin typeface="Arial"/>
               </a:rPr>
               <a:t>Dê graças</a:t>
-            </a:r>
-          </a:p>
-        </p:txBody>
-      </p:sp>
-      <p:sp>
-        <p:nvSpPr>
-          <p:cNvPr id="5" name="TextBox 4"/>
-          <p:cNvSpPr txBox="1"/>
-          <p:nvPr/>
-        </p:nvSpPr>
-        <p:spPr>
-          <a:xfrm>
-            <a:off x="594360" y="4251960"/>
-            <a:ext cx="11002975" cy="347472"/>
-          </a:xfrm>
-          <a:prstGeom prst="rect">
-            <a:avLst/>
-          </a:prstGeom>
-          <a:noFill/>
-        </p:spPr>
-        <p:txBody>
-          <a:bodyPr wrap="square">
-            <a:spAutoFit/>
-          </a:bodyPr>
-          <a:lstStyle/>
-          <a:p>
-            <a:pPr algn="ctr"/>
-            <a:r>
-              <a:rPr sz="2200" b="0" i="1">
-                <a:solidFill>
-                  <a:srgbClr val="8C8C8C"/>
-                </a:solidFill>
-                <a:latin typeface="Arial"/>
-              </a:rPr>
-              <a:t/>
             </a:r>
           </a:p>
         </p:txBody>
@@ -3273,8 +3203,8 @@
         </p:nvSpPr>
         <p:spPr>
           <a:xfrm>
-            <a:off x="594360" y="2258568"/>
-            <a:ext cx="11002975" cy="685800"/>
+            <a:off x="640080" y="2052828"/>
+            <a:ext cx="10911535" cy="731520"/>
           </a:xfrm>
           <a:prstGeom prst="rect">
             <a:avLst/>
@@ -3289,7 +3219,7 @@
           <a:p>
             <a:pPr algn="ctr"/>
             <a:r>
-              <a:rPr sz="4400" b="1" i="0">
+              <a:rPr sz="4800" b="1" i="0">
                 <a:solidFill>
                   <a:srgbClr val="FFFFFF"/>
                 </a:solidFill>
@@ -3308,8 +3238,8 @@
         </p:nvSpPr>
         <p:spPr>
           <a:xfrm>
-            <a:off x="594360" y="2980944"/>
-            <a:ext cx="11002975" cy="347472"/>
+            <a:off x="640080" y="2985516"/>
+            <a:ext cx="10911535" cy="731520"/>
           </a:xfrm>
           <a:prstGeom prst="rect">
             <a:avLst/>
@@ -3324,83 +3254,13 @@
           <a:p>
             <a:pPr algn="ctr"/>
             <a:r>
-              <a:rPr sz="2200" b="0" i="1">
-                <a:solidFill>
-                  <a:srgbClr val="8C8C8C"/>
-                </a:solidFill>
-                <a:latin typeface="Arial"/>
-              </a:rPr>
-              <a:t/>
-            </a:r>
-          </a:p>
-        </p:txBody>
-      </p:sp>
-      <p:sp>
-        <p:nvSpPr>
-          <p:cNvPr id="4" name="TextBox 3"/>
-          <p:cNvSpPr txBox="1"/>
-          <p:nvPr/>
-        </p:nvSpPr>
-        <p:spPr>
-          <a:xfrm>
-            <a:off x="594360" y="3529584"/>
-            <a:ext cx="11002975" cy="685800"/>
-          </a:xfrm>
-          <a:prstGeom prst="rect">
-            <a:avLst/>
-          </a:prstGeom>
-          <a:noFill/>
-        </p:spPr>
-        <p:txBody>
-          <a:bodyPr wrap="square">
-            <a:spAutoFit/>
-          </a:bodyPr>
-          <a:lstStyle/>
-          <a:p>
-            <a:pPr algn="ctr"/>
-            <a:r>
-              <a:rPr sz="4400" b="1" i="0">
+              <a:rPr sz="4800" b="1" i="0">
                 <a:solidFill>
                   <a:srgbClr val="FFFFFF"/>
                 </a:solidFill>
                 <a:latin typeface="Arial"/>
               </a:rPr>
               <a:t>Dê graças</a:t>
-            </a:r>
-          </a:p>
-        </p:txBody>
-      </p:sp>
-      <p:sp>
-        <p:nvSpPr>
-          <p:cNvPr id="5" name="TextBox 4"/>
-          <p:cNvSpPr txBox="1"/>
-          <p:nvPr/>
-        </p:nvSpPr>
-        <p:spPr>
-          <a:xfrm>
-            <a:off x="594360" y="4251960"/>
-            <a:ext cx="11002975" cy="347472"/>
-          </a:xfrm>
-          <a:prstGeom prst="rect">
-            <a:avLst/>
-          </a:prstGeom>
-          <a:noFill/>
-        </p:spPr>
-        <p:txBody>
-          <a:bodyPr wrap="square">
-            <a:spAutoFit/>
-          </a:bodyPr>
-          <a:lstStyle/>
-          <a:p>
-            <a:pPr algn="ctr"/>
-            <a:r>
-              <a:rPr sz="2200" b="0" i="1">
-                <a:solidFill>
-                  <a:srgbClr val="8C8C8C"/>
-                </a:solidFill>
-                <a:latin typeface="Arial"/>
-              </a:rPr>
-              <a:t/>
             </a:r>
           </a:p>
         </p:txBody>
@@ -3439,8 +3299,8 @@
         </p:nvSpPr>
         <p:spPr>
           <a:xfrm>
-            <a:off x="594360" y="2258568"/>
-            <a:ext cx="11002975" cy="685800"/>
+            <a:off x="640080" y="2052828"/>
+            <a:ext cx="10911535" cy="731520"/>
           </a:xfrm>
           <a:prstGeom prst="rect">
             <a:avLst/>
@@ -3455,7 +3315,7 @@
           <a:p>
             <a:pPr algn="ctr"/>
             <a:r>
-              <a:rPr sz="4400" b="1" i="0">
+              <a:rPr sz="4800" b="1" i="0">
                 <a:solidFill>
                   <a:srgbClr val="FFFFFF"/>
                 </a:solidFill>
@@ -3474,8 +3334,8 @@
         </p:nvSpPr>
         <p:spPr>
           <a:xfrm>
-            <a:off x="594360" y="2980944"/>
-            <a:ext cx="11002975" cy="347472"/>
+            <a:off x="640080" y="2985516"/>
+            <a:ext cx="10911535" cy="731520"/>
           </a:xfrm>
           <a:prstGeom prst="rect">
             <a:avLst/>
@@ -3490,83 +3350,13 @@
           <a:p>
             <a:pPr algn="ctr"/>
             <a:r>
-              <a:rPr sz="2200" b="0" i="1">
-                <a:solidFill>
-                  <a:srgbClr val="8C8C8C"/>
-                </a:solidFill>
-                <a:latin typeface="Arial"/>
-              </a:rPr>
-              <a:t/>
-            </a:r>
-          </a:p>
-        </p:txBody>
-      </p:sp>
-      <p:sp>
-        <p:nvSpPr>
-          <p:cNvPr id="4" name="TextBox 3"/>
-          <p:cNvSpPr txBox="1"/>
-          <p:nvPr/>
-        </p:nvSpPr>
-        <p:spPr>
-          <a:xfrm>
-            <a:off x="594360" y="3529584"/>
-            <a:ext cx="11002975" cy="685800"/>
-          </a:xfrm>
-          <a:prstGeom prst="rect">
-            <a:avLst/>
-          </a:prstGeom>
-          <a:noFill/>
-        </p:spPr>
-        <p:txBody>
-          <a:bodyPr wrap="square">
-            <a:spAutoFit/>
-          </a:bodyPr>
-          <a:lstStyle/>
-          <a:p>
-            <a:pPr algn="ctr"/>
-            <a:r>
-              <a:rPr sz="4400" b="1" i="0">
+              <a:rPr sz="4800" b="1" i="0">
                 <a:solidFill>
                   <a:srgbClr val="FFFFFF"/>
                 </a:solidFill>
                 <a:latin typeface="Arial"/>
               </a:rPr>
               <a:t>Dê graças</a:t>
-            </a:r>
-          </a:p>
-        </p:txBody>
-      </p:sp>
-      <p:sp>
-        <p:nvSpPr>
-          <p:cNvPr id="5" name="TextBox 4"/>
-          <p:cNvSpPr txBox="1"/>
-          <p:nvPr/>
-        </p:nvSpPr>
-        <p:spPr>
-          <a:xfrm>
-            <a:off x="594360" y="4251960"/>
-            <a:ext cx="11002975" cy="347472"/>
-          </a:xfrm>
-          <a:prstGeom prst="rect">
-            <a:avLst/>
-          </a:prstGeom>
-          <a:noFill/>
-        </p:spPr>
-        <p:txBody>
-          <a:bodyPr wrap="square">
-            <a:spAutoFit/>
-          </a:bodyPr>
-          <a:lstStyle/>
-          <a:p>
-            <a:pPr algn="ctr"/>
-            <a:r>
-              <a:rPr sz="2200" b="0" i="1">
-                <a:solidFill>
-                  <a:srgbClr val="8C8C8C"/>
-                </a:solidFill>
-                <a:latin typeface="Arial"/>
-              </a:rPr>
-              <a:t/>
             </a:r>
           </a:p>
         </p:txBody>
@@ -3605,8 +3395,8 @@
         </p:nvSpPr>
         <p:spPr>
           <a:xfrm>
-            <a:off x="594360" y="2258568"/>
-            <a:ext cx="11002975" cy="685800"/>
+            <a:off x="640080" y="2052828"/>
+            <a:ext cx="10911535" cy="731520"/>
           </a:xfrm>
           <a:prstGeom prst="rect">
             <a:avLst/>
@@ -3621,7 +3411,7 @@
           <a:p>
             <a:pPr algn="ctr"/>
             <a:r>
-              <a:rPr sz="4400" b="1" i="0">
+              <a:rPr sz="4800" b="1" i="0">
                 <a:solidFill>
                   <a:srgbClr val="FFFFFF"/>
                 </a:solidFill>
@@ -3640,8 +3430,8 @@
         </p:nvSpPr>
         <p:spPr>
           <a:xfrm>
-            <a:off x="594360" y="2980944"/>
-            <a:ext cx="11002975" cy="347472"/>
+            <a:off x="640080" y="2985516"/>
+            <a:ext cx="10911535" cy="731520"/>
           </a:xfrm>
           <a:prstGeom prst="rect">
             <a:avLst/>
@@ -3656,83 +3446,13 @@
           <a:p>
             <a:pPr algn="ctr"/>
             <a:r>
-              <a:rPr sz="2200" b="0" i="1">
-                <a:solidFill>
-                  <a:srgbClr val="8C8C8C"/>
-                </a:solidFill>
-                <a:latin typeface="Arial"/>
-              </a:rPr>
-              <a:t/>
-            </a:r>
-          </a:p>
-        </p:txBody>
-      </p:sp>
-      <p:sp>
-        <p:nvSpPr>
-          <p:cNvPr id="4" name="TextBox 3"/>
-          <p:cNvSpPr txBox="1"/>
-          <p:nvPr/>
-        </p:nvSpPr>
-        <p:spPr>
-          <a:xfrm>
-            <a:off x="594360" y="3529584"/>
-            <a:ext cx="11002975" cy="685800"/>
-          </a:xfrm>
-          <a:prstGeom prst="rect">
-            <a:avLst/>
-          </a:prstGeom>
-          <a:noFill/>
-        </p:spPr>
-        <p:txBody>
-          <a:bodyPr wrap="square">
-            <a:spAutoFit/>
-          </a:bodyPr>
-          <a:lstStyle/>
-          <a:p>
-            <a:pPr algn="ctr"/>
-            <a:r>
-              <a:rPr sz="4400" b="1" i="0">
+              <a:rPr sz="4800" b="1" i="0">
                 <a:solidFill>
                   <a:srgbClr val="FFFFFF"/>
                 </a:solidFill>
                 <a:latin typeface="Arial"/>
               </a:rPr>
               <a:t>Jesus Cristo, Seu Filho</a:t>
-            </a:r>
-          </a:p>
-        </p:txBody>
-      </p:sp>
-      <p:sp>
-        <p:nvSpPr>
-          <p:cNvPr id="5" name="TextBox 4"/>
-          <p:cNvSpPr txBox="1"/>
-          <p:nvPr/>
-        </p:nvSpPr>
-        <p:spPr>
-          <a:xfrm>
-            <a:off x="594360" y="4251960"/>
-            <a:ext cx="11002975" cy="347472"/>
-          </a:xfrm>
-          <a:prstGeom prst="rect">
-            <a:avLst/>
-          </a:prstGeom>
-          <a:noFill/>
-        </p:spPr>
-        <p:txBody>
-          <a:bodyPr wrap="square">
-            <a:spAutoFit/>
-          </a:bodyPr>
-          <a:lstStyle/>
-          <a:p>
-            <a:pPr algn="ctr"/>
-            <a:r>
-              <a:rPr sz="2200" b="0" i="1">
-                <a:solidFill>
-                  <a:srgbClr val="8C8C8C"/>
-                </a:solidFill>
-                <a:latin typeface="Arial"/>
-              </a:rPr>
-              <a:t/>
             </a:r>
           </a:p>
         </p:txBody>

--- a/output_pptx/Give_Thanks.pptx
+++ b/output_pptx/Give_Thanks.pptx
@@ -3169,6 +3169,76 @@
           </a:p>
         </p:txBody>
       </p:sp>
+      <p:sp>
+        <p:nvSpPr>
+          <p:cNvPr id="4" name="TextBox 3"/>
+          <p:cNvSpPr txBox="1"/>
+          <p:nvPr/>
+        </p:nvSpPr>
+        <p:spPr>
+          <a:xfrm>
+            <a:off x="640080" y="4128516"/>
+            <a:ext cx="10911535" cy="310896"/>
+          </a:xfrm>
+          <a:prstGeom prst="rect">
+            <a:avLst/>
+          </a:prstGeom>
+          <a:noFill/>
+        </p:spPr>
+        <p:txBody>
+          <a:bodyPr wrap="square">
+            <a:spAutoFit/>
+          </a:bodyPr>
+          <a:lstStyle/>
+          <a:p>
+            <a:pPr algn="ctr"/>
+            <a:r>
+              <a:rPr sz="2000" b="0" i="0">
+                <a:solidFill>
+                  <a:srgbClr val="828282"/>
+                </a:solidFill>
+                <a:latin typeface="Arial"/>
+              </a:rPr>
+              <a:t>感謝をささげよ</a:t>
+            </a:r>
+          </a:p>
+        </p:txBody>
+      </p:sp>
+      <p:sp>
+        <p:nvSpPr>
+          <p:cNvPr id="5" name="TextBox 4"/>
+          <p:cNvSpPr txBox="1"/>
+          <p:nvPr/>
+        </p:nvSpPr>
+        <p:spPr>
+          <a:xfrm>
+            <a:off x="640080" y="4494276"/>
+            <a:ext cx="10911535" cy="310896"/>
+          </a:xfrm>
+          <a:prstGeom prst="rect">
+            <a:avLst/>
+          </a:prstGeom>
+          <a:noFill/>
+        </p:spPr>
+        <p:txBody>
+          <a:bodyPr wrap="square">
+            <a:spAutoFit/>
+          </a:bodyPr>
+          <a:lstStyle/>
+          <a:p>
+            <a:pPr algn="ctr"/>
+            <a:r>
+              <a:rPr sz="2000" b="0" i="0">
+                <a:solidFill>
+                  <a:srgbClr val="828282"/>
+                </a:solidFill>
+                <a:latin typeface="Arial"/>
+              </a:rPr>
+              <a:t>感謝しなさい</a:t>
+            </a:r>
+          </a:p>
+        </p:txBody>
+      </p:sp>
     </p:spTree>
   </p:cSld>
   <p:clrMapOvr>
@@ -3265,6 +3335,76 @@
           </a:p>
         </p:txBody>
       </p:sp>
+      <p:sp>
+        <p:nvSpPr>
+          <p:cNvPr id="4" name="TextBox 3"/>
+          <p:cNvSpPr txBox="1"/>
+          <p:nvPr/>
+        </p:nvSpPr>
+        <p:spPr>
+          <a:xfrm>
+            <a:off x="640080" y="4128516"/>
+            <a:ext cx="10911535" cy="310896"/>
+          </a:xfrm>
+          <a:prstGeom prst="rect">
+            <a:avLst/>
+          </a:prstGeom>
+          <a:noFill/>
+        </p:spPr>
+        <p:txBody>
+          <a:bodyPr wrap="square">
+            <a:spAutoFit/>
+          </a:bodyPr>
+          <a:lstStyle/>
+          <a:p>
+            <a:pPr algn="ctr"/>
+            <a:r>
+              <a:rPr sz="2000" b="0" i="0">
+                <a:solidFill>
+                  <a:srgbClr val="828282"/>
+                </a:solidFill>
+                <a:latin typeface="Arial"/>
+              </a:rPr>
+              <a:t>感謝の心で</a:t>
+            </a:r>
+          </a:p>
+        </p:txBody>
+      </p:sp>
+      <p:sp>
+        <p:nvSpPr>
+          <p:cNvPr id="5" name="TextBox 4"/>
+          <p:cNvSpPr txBox="1"/>
+          <p:nvPr/>
+        </p:nvSpPr>
+        <p:spPr>
+          <a:xfrm>
+            <a:off x="640080" y="4494276"/>
+            <a:ext cx="10911535" cy="310896"/>
+          </a:xfrm>
+          <a:prstGeom prst="rect">
+            <a:avLst/>
+          </a:prstGeom>
+          <a:noFill/>
+        </p:spPr>
+        <p:txBody>
+          <a:bodyPr wrap="square">
+            <a:spAutoFit/>
+          </a:bodyPr>
+          <a:lstStyle/>
+          <a:p>
+            <a:pPr algn="ctr"/>
+            <a:r>
+              <a:rPr sz="2000" b="0" i="0">
+                <a:solidFill>
+                  <a:srgbClr val="828282"/>
+                </a:solidFill>
+                <a:latin typeface="Arial"/>
+              </a:rPr>
+              <a:t>感謝しなさい</a:t>
+            </a:r>
+          </a:p>
+        </p:txBody>
+      </p:sp>
     </p:spTree>
   </p:cSld>
   <p:clrMapOvr>
@@ -3361,6 +3501,76 @@
           </a:p>
         </p:txBody>
       </p:sp>
+      <p:sp>
+        <p:nvSpPr>
+          <p:cNvPr id="4" name="TextBox 3"/>
+          <p:cNvSpPr txBox="1"/>
+          <p:nvPr/>
+        </p:nvSpPr>
+        <p:spPr>
+          <a:xfrm>
+            <a:off x="640080" y="4128516"/>
+            <a:ext cx="10911535" cy="310896"/>
+          </a:xfrm>
+          <a:prstGeom prst="rect">
+            <a:avLst/>
+          </a:prstGeom>
+          <a:noFill/>
+        </p:spPr>
+        <p:txBody>
+          <a:bodyPr wrap="square">
+            <a:spAutoFit/>
+          </a:bodyPr>
+          <a:lstStyle/>
+          <a:p>
+            <a:pPr algn="ctr"/>
+            <a:r>
+              <a:rPr sz="2000" b="0" i="0">
+                <a:solidFill>
+                  <a:srgbClr val="828282"/>
+                </a:solidFill>
+                <a:latin typeface="Arial"/>
+              </a:rPr>
+              <a:t>聖なる方に</a:t>
+            </a:r>
+          </a:p>
+        </p:txBody>
+      </p:sp>
+      <p:sp>
+        <p:nvSpPr>
+          <p:cNvPr id="5" name="TextBox 4"/>
+          <p:cNvSpPr txBox="1"/>
+          <p:nvPr/>
+        </p:nvSpPr>
+        <p:spPr>
+          <a:xfrm>
+            <a:off x="640080" y="4494276"/>
+            <a:ext cx="10911535" cy="310896"/>
+          </a:xfrm>
+          <a:prstGeom prst="rect">
+            <a:avLst/>
+          </a:prstGeom>
+          <a:noFill/>
+        </p:spPr>
+        <p:txBody>
+          <a:bodyPr wrap="square">
+            <a:spAutoFit/>
+          </a:bodyPr>
+          <a:lstStyle/>
+          <a:p>
+            <a:pPr algn="ctr"/>
+            <a:r>
+              <a:rPr sz="2000" b="0" i="0">
+                <a:solidFill>
+                  <a:srgbClr val="828282"/>
+                </a:solidFill>
+                <a:latin typeface="Arial"/>
+              </a:rPr>
+              <a:t>感謝しなさい</a:t>
+            </a:r>
+          </a:p>
+        </p:txBody>
+      </p:sp>
     </p:spTree>
   </p:cSld>
   <p:clrMapOvr>
@@ -3453,6 +3663,76 @@
                 <a:latin typeface="Arial"/>
               </a:rPr>
               <a:t>Jesus Cristo, Seu Filho</a:t>
+            </a:r>
+          </a:p>
+        </p:txBody>
+      </p:sp>
+      <p:sp>
+        <p:nvSpPr>
+          <p:cNvPr id="4" name="TextBox 3"/>
+          <p:cNvSpPr txBox="1"/>
+          <p:nvPr/>
+        </p:nvSpPr>
+        <p:spPr>
+          <a:xfrm>
+            <a:off x="640080" y="4128516"/>
+            <a:ext cx="10911535" cy="310896"/>
+          </a:xfrm>
+          <a:prstGeom prst="rect">
+            <a:avLst/>
+          </a:prstGeom>
+          <a:noFill/>
+        </p:spPr>
+        <p:txBody>
+          <a:bodyPr wrap="square">
+            <a:spAutoFit/>
+          </a:bodyPr>
+          <a:lstStyle/>
+          <a:p>
+            <a:pPr algn="ctr"/>
+            <a:r>
+              <a:rPr sz="2000" b="0" i="0">
+                <a:solidFill>
+                  <a:srgbClr val="828282"/>
+                </a:solidFill>
+                <a:latin typeface="Arial"/>
+              </a:rPr>
+              <a:t>なぜなら主は与えてくださったから</a:t>
+            </a:r>
+          </a:p>
+        </p:txBody>
+      </p:sp>
+      <p:sp>
+        <p:nvSpPr>
+          <p:cNvPr id="5" name="TextBox 4"/>
+          <p:cNvSpPr txBox="1"/>
+          <p:nvPr/>
+        </p:nvSpPr>
+        <p:spPr>
+          <a:xfrm>
+            <a:off x="640080" y="4494276"/>
+            <a:ext cx="10911535" cy="310896"/>
+          </a:xfrm>
+          <a:prstGeom prst="rect">
+            <a:avLst/>
+          </a:prstGeom>
+          <a:noFill/>
+        </p:spPr>
+        <p:txBody>
+          <a:bodyPr wrap="square">
+            <a:spAutoFit/>
+          </a:bodyPr>
+          <a:lstStyle/>
+          <a:p>
+            <a:pPr algn="ctr"/>
+            <a:r>
+              <a:rPr sz="2000" b="0" i="0">
+                <a:solidFill>
+                  <a:srgbClr val="828282"/>
+                </a:solidFill>
+                <a:latin typeface="Arial"/>
+              </a:rPr>
+              <a:t>イエス・キリスト、神の子よ</a:t>
             </a:r>
           </a:p>
         </p:txBody>
